--- a/testcases/text-ea-lang.pptx
+++ b/testcases/text-ea-lang.pptx
@@ -129,7 +129,7 @@
           <p:cNvPr id="2" name="标题 1">
             <a:extLst>
               <a:ext uri="{FF2B5EF4-FFF2-40B4-BE49-F238E27FC236}">
-                <a16:creationId xmlns:a16="http://schemas.microsoft.com/office/drawing/2014/main" id="{32C4C7CC-9CD6-0B94-A6E7-F6BB2504ADE3}"/>
+                <a16:creationId xmlns:a16="http://schemas.microsoft.com/office/drawing/2014/main" id="{9AC3D2ED-8E98-1F37-86C5-83C04EB99F1C}"/>
               </a:ext>
             </a:extLst>
           </p:cNvPr>
@@ -166,7 +166,7 @@
           <p:cNvPr id="3" name="副标题 2">
             <a:extLst>
               <a:ext uri="{FF2B5EF4-FFF2-40B4-BE49-F238E27FC236}">
-                <a16:creationId xmlns:a16="http://schemas.microsoft.com/office/drawing/2014/main" id="{2C8B5745-19C4-8B19-D80C-98E4B3401CD1}"/>
+                <a16:creationId xmlns:a16="http://schemas.microsoft.com/office/drawing/2014/main" id="{34477359-B646-477A-875D-CFD1364BDA69}"/>
               </a:ext>
             </a:extLst>
           </p:cNvPr>
@@ -236,7 +236,7 @@
           <p:cNvPr id="4" name="日期占位符 3">
             <a:extLst>
               <a:ext uri="{FF2B5EF4-FFF2-40B4-BE49-F238E27FC236}">
-                <a16:creationId xmlns:a16="http://schemas.microsoft.com/office/drawing/2014/main" id="{EE651CB7-E017-A06A-8DC1-23CA6936F99F}"/>
+                <a16:creationId xmlns:a16="http://schemas.microsoft.com/office/drawing/2014/main" id="{52C57EBB-20F8-BD4C-2BC2-52FF4572FF9F}"/>
               </a:ext>
             </a:extLst>
           </p:cNvPr>
@@ -252,7 +252,7 @@
           <a:bodyPr/>
           <a:lstStyle/>
           <a:p>
-            <a:fld id="{18C01C04-3DC0-4A24-A224-DFA7E91EC9FC}" type="datetimeFigureOut">
+            <a:fld id="{D80CACDC-A2EB-491F-835B-8E351DC3245E}" type="datetimeFigureOut">
               <a:rPr lang="zh-CN" altLang="en-US" smtClean="0"/>
               <a:t>2026/10/17</a:t>
             </a:fld>
@@ -265,7 +265,7 @@
           <p:cNvPr id="5" name="页脚占位符 4">
             <a:extLst>
               <a:ext uri="{FF2B5EF4-FFF2-40B4-BE49-F238E27FC236}">
-                <a16:creationId xmlns:a16="http://schemas.microsoft.com/office/drawing/2014/main" id="{E9DF8909-75D9-3E40-FFE5-0CB45D8AF0BA}"/>
+                <a16:creationId xmlns:a16="http://schemas.microsoft.com/office/drawing/2014/main" id="{D5CFBC77-AEAF-62DA-A75D-ABD73180F109}"/>
               </a:ext>
             </a:extLst>
           </p:cNvPr>
@@ -290,7 +290,7 @@
           <p:cNvPr id="6" name="灯片编号占位符 5">
             <a:extLst>
               <a:ext uri="{FF2B5EF4-FFF2-40B4-BE49-F238E27FC236}">
-                <a16:creationId xmlns:a16="http://schemas.microsoft.com/office/drawing/2014/main" id="{2B0604AD-ADBD-92DE-EF72-DBDE40ABCA94}"/>
+                <a16:creationId xmlns:a16="http://schemas.microsoft.com/office/drawing/2014/main" id="{C45C99A8-AC24-B8F2-6F59-28FBE5038155}"/>
               </a:ext>
             </a:extLst>
           </p:cNvPr>
@@ -306,7 +306,7 @@
           <a:bodyPr/>
           <a:lstStyle/>
           <a:p>
-            <a:fld id="{977BA5C2-78C0-42E3-92E2-271E6665EFE3}" type="slidenum">
+            <a:fld id="{0472F0E1-B9CB-41AB-B64C-386031966086}" type="slidenum">
               <a:rPr lang="zh-CN" altLang="en-US" smtClean="0"/>
               <a:t>‹#›</a:t>
             </a:fld>
@@ -317,7 +317,7 @@
     </p:spTree>
     <p:extLst>
       <p:ext uri="{BB962C8B-B14F-4D97-AF65-F5344CB8AC3E}">
-        <p14:creationId xmlns:p14="http://schemas.microsoft.com/office/powerpoint/2010/main" val="9054271"/>
+        <p14:creationId xmlns:p14="http://schemas.microsoft.com/office/powerpoint/2010/main" val="2336118280"/>
       </p:ext>
     </p:extLst>
   </p:cSld>
@@ -349,7 +349,7 @@
           <p:cNvPr id="2" name="标题 1">
             <a:extLst>
               <a:ext uri="{FF2B5EF4-FFF2-40B4-BE49-F238E27FC236}">
-                <a16:creationId xmlns:a16="http://schemas.microsoft.com/office/drawing/2014/main" id="{83DB019A-6BB1-BFC2-4B20-44940C1D38DA}"/>
+                <a16:creationId xmlns:a16="http://schemas.microsoft.com/office/drawing/2014/main" id="{0A517DE1-2C55-2D75-FA52-6D67B28A3E43}"/>
               </a:ext>
             </a:extLst>
           </p:cNvPr>
@@ -377,7 +377,7 @@
           <p:cNvPr id="3" name="竖排文字占位符 2">
             <a:extLst>
               <a:ext uri="{FF2B5EF4-FFF2-40B4-BE49-F238E27FC236}">
-                <a16:creationId xmlns:a16="http://schemas.microsoft.com/office/drawing/2014/main" id="{BA9ACD2B-2A72-D53C-BF32-BF5489085CEB}"/>
+                <a16:creationId xmlns:a16="http://schemas.microsoft.com/office/drawing/2014/main" id="{0AD4BCD3-A26D-6C5F-4914-258C83AEDEFD}"/>
               </a:ext>
             </a:extLst>
           </p:cNvPr>
@@ -434,7 +434,7 @@
           <p:cNvPr id="4" name="日期占位符 3">
             <a:extLst>
               <a:ext uri="{FF2B5EF4-FFF2-40B4-BE49-F238E27FC236}">
-                <a16:creationId xmlns:a16="http://schemas.microsoft.com/office/drawing/2014/main" id="{8DA85847-07C0-761F-CD4B-4587057BAB86}"/>
+                <a16:creationId xmlns:a16="http://schemas.microsoft.com/office/drawing/2014/main" id="{5C18F7FD-4F23-1226-A845-8E23DC3AF762}"/>
               </a:ext>
             </a:extLst>
           </p:cNvPr>
@@ -450,7 +450,7 @@
           <a:bodyPr/>
           <a:lstStyle/>
           <a:p>
-            <a:fld id="{18C01C04-3DC0-4A24-A224-DFA7E91EC9FC}" type="datetimeFigureOut">
+            <a:fld id="{D80CACDC-A2EB-491F-835B-8E351DC3245E}" type="datetimeFigureOut">
               <a:rPr lang="zh-CN" altLang="en-US" smtClean="0"/>
               <a:t>2026/10/17</a:t>
             </a:fld>
@@ -463,7 +463,7 @@
           <p:cNvPr id="5" name="页脚占位符 4">
             <a:extLst>
               <a:ext uri="{FF2B5EF4-FFF2-40B4-BE49-F238E27FC236}">
-                <a16:creationId xmlns:a16="http://schemas.microsoft.com/office/drawing/2014/main" id="{B2ECF333-0F63-066E-6AAC-6D860FE0C183}"/>
+                <a16:creationId xmlns:a16="http://schemas.microsoft.com/office/drawing/2014/main" id="{DBDA1731-76FF-CA49-E075-DC28F64DC406}"/>
               </a:ext>
             </a:extLst>
           </p:cNvPr>
@@ -488,7 +488,7 @@
           <p:cNvPr id="6" name="灯片编号占位符 5">
             <a:extLst>
               <a:ext uri="{FF2B5EF4-FFF2-40B4-BE49-F238E27FC236}">
-                <a16:creationId xmlns:a16="http://schemas.microsoft.com/office/drawing/2014/main" id="{3B7CD823-E891-A9CD-C9C5-3F6DE1DA4F88}"/>
+                <a16:creationId xmlns:a16="http://schemas.microsoft.com/office/drawing/2014/main" id="{C6E2FE9A-5B17-45F5-CE98-B7EC3DF38452}"/>
               </a:ext>
             </a:extLst>
           </p:cNvPr>
@@ -504,7 +504,7 @@
           <a:bodyPr/>
           <a:lstStyle/>
           <a:p>
-            <a:fld id="{977BA5C2-78C0-42E3-92E2-271E6665EFE3}" type="slidenum">
+            <a:fld id="{0472F0E1-B9CB-41AB-B64C-386031966086}" type="slidenum">
               <a:rPr lang="zh-CN" altLang="en-US" smtClean="0"/>
               <a:t>‹#›</a:t>
             </a:fld>
@@ -515,7 +515,7 @@
     </p:spTree>
     <p:extLst>
       <p:ext uri="{BB962C8B-B14F-4D97-AF65-F5344CB8AC3E}">
-        <p14:creationId xmlns:p14="http://schemas.microsoft.com/office/powerpoint/2010/main" val="1918975018"/>
+        <p14:creationId xmlns:p14="http://schemas.microsoft.com/office/powerpoint/2010/main" val="2585917349"/>
       </p:ext>
     </p:extLst>
   </p:cSld>
@@ -547,7 +547,7 @@
           <p:cNvPr id="2" name="竖排标题 1">
             <a:extLst>
               <a:ext uri="{FF2B5EF4-FFF2-40B4-BE49-F238E27FC236}">
-                <a16:creationId xmlns:a16="http://schemas.microsoft.com/office/drawing/2014/main" id="{7FDE6C45-6ABC-6325-A754-1753EE427515}"/>
+                <a16:creationId xmlns:a16="http://schemas.microsoft.com/office/drawing/2014/main" id="{8886C861-D8CD-9FE1-5B75-2D52F14A2503}"/>
               </a:ext>
             </a:extLst>
           </p:cNvPr>
@@ -580,7 +580,7 @@
           <p:cNvPr id="3" name="竖排文字占位符 2">
             <a:extLst>
               <a:ext uri="{FF2B5EF4-FFF2-40B4-BE49-F238E27FC236}">
-                <a16:creationId xmlns:a16="http://schemas.microsoft.com/office/drawing/2014/main" id="{BB994758-0705-E763-9DC9-B33BFDCD2898}"/>
+                <a16:creationId xmlns:a16="http://schemas.microsoft.com/office/drawing/2014/main" id="{C077D4EE-C906-78D2-1FFB-10C2F0A9CD0E}"/>
               </a:ext>
             </a:extLst>
           </p:cNvPr>
@@ -642,7 +642,7 @@
           <p:cNvPr id="4" name="日期占位符 3">
             <a:extLst>
               <a:ext uri="{FF2B5EF4-FFF2-40B4-BE49-F238E27FC236}">
-                <a16:creationId xmlns:a16="http://schemas.microsoft.com/office/drawing/2014/main" id="{5BBB34C2-23CD-7772-EF42-F639F3792922}"/>
+                <a16:creationId xmlns:a16="http://schemas.microsoft.com/office/drawing/2014/main" id="{C8FD57DF-48B6-4921-D444-515670955B67}"/>
               </a:ext>
             </a:extLst>
           </p:cNvPr>
@@ -658,7 +658,7 @@
           <a:bodyPr/>
           <a:lstStyle/>
           <a:p>
-            <a:fld id="{18C01C04-3DC0-4A24-A224-DFA7E91EC9FC}" type="datetimeFigureOut">
+            <a:fld id="{D80CACDC-A2EB-491F-835B-8E351DC3245E}" type="datetimeFigureOut">
               <a:rPr lang="zh-CN" altLang="en-US" smtClean="0"/>
               <a:t>2026/10/17</a:t>
             </a:fld>
@@ -671,7 +671,7 @@
           <p:cNvPr id="5" name="页脚占位符 4">
             <a:extLst>
               <a:ext uri="{FF2B5EF4-FFF2-40B4-BE49-F238E27FC236}">
-                <a16:creationId xmlns:a16="http://schemas.microsoft.com/office/drawing/2014/main" id="{28DAC465-5943-6C11-340C-2B8674B2422B}"/>
+                <a16:creationId xmlns:a16="http://schemas.microsoft.com/office/drawing/2014/main" id="{963FED72-73E6-5E16-2938-183DDF0A7671}"/>
               </a:ext>
             </a:extLst>
           </p:cNvPr>
@@ -696,7 +696,7 @@
           <p:cNvPr id="6" name="灯片编号占位符 5">
             <a:extLst>
               <a:ext uri="{FF2B5EF4-FFF2-40B4-BE49-F238E27FC236}">
-                <a16:creationId xmlns:a16="http://schemas.microsoft.com/office/drawing/2014/main" id="{64D0E2CA-84DE-9CFD-F102-A9FDFBED1BB4}"/>
+                <a16:creationId xmlns:a16="http://schemas.microsoft.com/office/drawing/2014/main" id="{7B050F01-2F32-59FE-F553-75CAD089FD00}"/>
               </a:ext>
             </a:extLst>
           </p:cNvPr>
@@ -712,7 +712,7 @@
           <a:bodyPr/>
           <a:lstStyle/>
           <a:p>
-            <a:fld id="{977BA5C2-78C0-42E3-92E2-271E6665EFE3}" type="slidenum">
+            <a:fld id="{0472F0E1-B9CB-41AB-B64C-386031966086}" type="slidenum">
               <a:rPr lang="zh-CN" altLang="en-US" smtClean="0"/>
               <a:t>‹#›</a:t>
             </a:fld>
@@ -723,7 +723,7 @@
     </p:spTree>
     <p:extLst>
       <p:ext uri="{BB962C8B-B14F-4D97-AF65-F5344CB8AC3E}">
-        <p14:creationId xmlns:p14="http://schemas.microsoft.com/office/powerpoint/2010/main" val="1552915845"/>
+        <p14:creationId xmlns:p14="http://schemas.microsoft.com/office/powerpoint/2010/main" val="85687301"/>
       </p:ext>
     </p:extLst>
   </p:cSld>
@@ -755,7 +755,7 @@
           <p:cNvPr id="2" name="标题 1">
             <a:extLst>
               <a:ext uri="{FF2B5EF4-FFF2-40B4-BE49-F238E27FC236}">
-                <a16:creationId xmlns:a16="http://schemas.microsoft.com/office/drawing/2014/main" id="{997BEB71-CC00-18D7-30AE-23328B9753E0}"/>
+                <a16:creationId xmlns:a16="http://schemas.microsoft.com/office/drawing/2014/main" id="{6B846F7A-F5D4-DEF5-054F-D22E50AB7151}"/>
               </a:ext>
             </a:extLst>
           </p:cNvPr>
@@ -783,7 +783,7 @@
           <p:cNvPr id="3" name="内容占位符 2">
             <a:extLst>
               <a:ext uri="{FF2B5EF4-FFF2-40B4-BE49-F238E27FC236}">
-                <a16:creationId xmlns:a16="http://schemas.microsoft.com/office/drawing/2014/main" id="{B09A673A-D66D-A918-FBEE-4EE3D7069C56}"/>
+                <a16:creationId xmlns:a16="http://schemas.microsoft.com/office/drawing/2014/main" id="{7C0F87FE-ECA8-13B0-918E-30C86A245FEE}"/>
               </a:ext>
             </a:extLst>
           </p:cNvPr>
@@ -840,7 +840,7 @@
           <p:cNvPr id="4" name="日期占位符 3">
             <a:extLst>
               <a:ext uri="{FF2B5EF4-FFF2-40B4-BE49-F238E27FC236}">
-                <a16:creationId xmlns:a16="http://schemas.microsoft.com/office/drawing/2014/main" id="{A8158B4D-6425-834B-9CF8-354BE0982344}"/>
+                <a16:creationId xmlns:a16="http://schemas.microsoft.com/office/drawing/2014/main" id="{63013A33-A3A3-7622-8653-9EFB53FF5E9A}"/>
               </a:ext>
             </a:extLst>
           </p:cNvPr>
@@ -856,7 +856,7 @@
           <a:bodyPr/>
           <a:lstStyle/>
           <a:p>
-            <a:fld id="{18C01C04-3DC0-4A24-A224-DFA7E91EC9FC}" type="datetimeFigureOut">
+            <a:fld id="{D80CACDC-A2EB-491F-835B-8E351DC3245E}" type="datetimeFigureOut">
               <a:rPr lang="zh-CN" altLang="en-US" smtClean="0"/>
               <a:t>2026/10/17</a:t>
             </a:fld>
@@ -869,7 +869,7 @@
           <p:cNvPr id="5" name="页脚占位符 4">
             <a:extLst>
               <a:ext uri="{FF2B5EF4-FFF2-40B4-BE49-F238E27FC236}">
-                <a16:creationId xmlns:a16="http://schemas.microsoft.com/office/drawing/2014/main" id="{20511C92-1840-AA0C-71B3-28308693FA49}"/>
+                <a16:creationId xmlns:a16="http://schemas.microsoft.com/office/drawing/2014/main" id="{DF03E788-9AC6-1916-3F42-BA7AAD3A3E2D}"/>
               </a:ext>
             </a:extLst>
           </p:cNvPr>
@@ -894,7 +894,7 @@
           <p:cNvPr id="6" name="灯片编号占位符 5">
             <a:extLst>
               <a:ext uri="{FF2B5EF4-FFF2-40B4-BE49-F238E27FC236}">
-                <a16:creationId xmlns:a16="http://schemas.microsoft.com/office/drawing/2014/main" id="{6E6AED94-BB64-A5DB-F344-26AD2122C225}"/>
+                <a16:creationId xmlns:a16="http://schemas.microsoft.com/office/drawing/2014/main" id="{8D3049CD-A9DC-439F-1134-4E79B36B1D8E}"/>
               </a:ext>
             </a:extLst>
           </p:cNvPr>
@@ -910,7 +910,7 @@
           <a:bodyPr/>
           <a:lstStyle/>
           <a:p>
-            <a:fld id="{977BA5C2-78C0-42E3-92E2-271E6665EFE3}" type="slidenum">
+            <a:fld id="{0472F0E1-B9CB-41AB-B64C-386031966086}" type="slidenum">
               <a:rPr lang="zh-CN" altLang="en-US" smtClean="0"/>
               <a:t>‹#›</a:t>
             </a:fld>
@@ -921,7 +921,7 @@
     </p:spTree>
     <p:extLst>
       <p:ext uri="{BB962C8B-B14F-4D97-AF65-F5344CB8AC3E}">
-        <p14:creationId xmlns:p14="http://schemas.microsoft.com/office/powerpoint/2010/main" val="3323976175"/>
+        <p14:creationId xmlns:p14="http://schemas.microsoft.com/office/powerpoint/2010/main" val="1909926200"/>
       </p:ext>
     </p:extLst>
   </p:cSld>
@@ -953,7 +953,7 @@
           <p:cNvPr id="2" name="标题 1">
             <a:extLst>
               <a:ext uri="{FF2B5EF4-FFF2-40B4-BE49-F238E27FC236}">
-                <a16:creationId xmlns:a16="http://schemas.microsoft.com/office/drawing/2014/main" id="{EFBE423F-9436-164F-9533-BC92B8D6BB91}"/>
+                <a16:creationId xmlns:a16="http://schemas.microsoft.com/office/drawing/2014/main" id="{3E9449FB-BDD9-B4C9-541C-BEBE38138C5C}"/>
               </a:ext>
             </a:extLst>
           </p:cNvPr>
@@ -990,7 +990,7 @@
           <p:cNvPr id="3" name="文本占位符 2">
             <a:extLst>
               <a:ext uri="{FF2B5EF4-FFF2-40B4-BE49-F238E27FC236}">
-                <a16:creationId xmlns:a16="http://schemas.microsoft.com/office/drawing/2014/main" id="{D69B353D-4497-56FC-F09E-B58FA7823ACA}"/>
+                <a16:creationId xmlns:a16="http://schemas.microsoft.com/office/drawing/2014/main" id="{93989A9D-73F3-36D2-526B-EA4C5CD17FB5}"/>
               </a:ext>
             </a:extLst>
           </p:cNvPr>
@@ -1115,7 +1115,7 @@
           <p:cNvPr id="4" name="日期占位符 3">
             <a:extLst>
               <a:ext uri="{FF2B5EF4-FFF2-40B4-BE49-F238E27FC236}">
-                <a16:creationId xmlns:a16="http://schemas.microsoft.com/office/drawing/2014/main" id="{2E2F2735-38DD-4B48-F23E-1B01F28FB6E6}"/>
+                <a16:creationId xmlns:a16="http://schemas.microsoft.com/office/drawing/2014/main" id="{6544A6F3-3901-BF98-79E5-DBCD1D9EF44C}"/>
               </a:ext>
             </a:extLst>
           </p:cNvPr>
@@ -1131,7 +1131,7 @@
           <a:bodyPr/>
           <a:lstStyle/>
           <a:p>
-            <a:fld id="{18C01C04-3DC0-4A24-A224-DFA7E91EC9FC}" type="datetimeFigureOut">
+            <a:fld id="{D80CACDC-A2EB-491F-835B-8E351DC3245E}" type="datetimeFigureOut">
               <a:rPr lang="zh-CN" altLang="en-US" smtClean="0"/>
               <a:t>2026/10/17</a:t>
             </a:fld>
@@ -1144,7 +1144,7 @@
           <p:cNvPr id="5" name="页脚占位符 4">
             <a:extLst>
               <a:ext uri="{FF2B5EF4-FFF2-40B4-BE49-F238E27FC236}">
-                <a16:creationId xmlns:a16="http://schemas.microsoft.com/office/drawing/2014/main" id="{CF51C814-909F-0D8C-9256-6A2BB399755C}"/>
+                <a16:creationId xmlns:a16="http://schemas.microsoft.com/office/drawing/2014/main" id="{3DDFFC96-E157-2341-1459-019AE8E54880}"/>
               </a:ext>
             </a:extLst>
           </p:cNvPr>
@@ -1169,7 +1169,7 @@
           <p:cNvPr id="6" name="灯片编号占位符 5">
             <a:extLst>
               <a:ext uri="{FF2B5EF4-FFF2-40B4-BE49-F238E27FC236}">
-                <a16:creationId xmlns:a16="http://schemas.microsoft.com/office/drawing/2014/main" id="{811D862C-666C-C86C-3A53-48AA24412E53}"/>
+                <a16:creationId xmlns:a16="http://schemas.microsoft.com/office/drawing/2014/main" id="{E7459C82-321C-FD1A-26A3-7FDB099F30DA}"/>
               </a:ext>
             </a:extLst>
           </p:cNvPr>
@@ -1185,7 +1185,7 @@
           <a:bodyPr/>
           <a:lstStyle/>
           <a:p>
-            <a:fld id="{977BA5C2-78C0-42E3-92E2-271E6665EFE3}" type="slidenum">
+            <a:fld id="{0472F0E1-B9CB-41AB-B64C-386031966086}" type="slidenum">
               <a:rPr lang="zh-CN" altLang="en-US" smtClean="0"/>
               <a:t>‹#›</a:t>
             </a:fld>
@@ -1196,7 +1196,7 @@
     </p:spTree>
     <p:extLst>
       <p:ext uri="{BB962C8B-B14F-4D97-AF65-F5344CB8AC3E}">
-        <p14:creationId xmlns:p14="http://schemas.microsoft.com/office/powerpoint/2010/main" val="741594528"/>
+        <p14:creationId xmlns:p14="http://schemas.microsoft.com/office/powerpoint/2010/main" val="226036695"/>
       </p:ext>
     </p:extLst>
   </p:cSld>
@@ -1228,7 +1228,7 @@
           <p:cNvPr id="2" name="标题 1">
             <a:extLst>
               <a:ext uri="{FF2B5EF4-FFF2-40B4-BE49-F238E27FC236}">
-                <a16:creationId xmlns:a16="http://schemas.microsoft.com/office/drawing/2014/main" id="{BE99401F-9078-56F9-6D2E-62D66CB800DE}"/>
+                <a16:creationId xmlns:a16="http://schemas.microsoft.com/office/drawing/2014/main" id="{25387B0F-5B64-4A3A-A280-88C21272BC7B}"/>
               </a:ext>
             </a:extLst>
           </p:cNvPr>
@@ -1256,7 +1256,7 @@
           <p:cNvPr id="3" name="内容占位符 2">
             <a:extLst>
               <a:ext uri="{FF2B5EF4-FFF2-40B4-BE49-F238E27FC236}">
-                <a16:creationId xmlns:a16="http://schemas.microsoft.com/office/drawing/2014/main" id="{599FDF71-DCF6-7B55-51CB-B40E748C909F}"/>
+                <a16:creationId xmlns:a16="http://schemas.microsoft.com/office/drawing/2014/main" id="{25B4A24B-2E54-389D-D3AF-CDC533004DC9}"/>
               </a:ext>
             </a:extLst>
           </p:cNvPr>
@@ -1318,7 +1318,7 @@
           <p:cNvPr id="4" name="内容占位符 3">
             <a:extLst>
               <a:ext uri="{FF2B5EF4-FFF2-40B4-BE49-F238E27FC236}">
-                <a16:creationId xmlns:a16="http://schemas.microsoft.com/office/drawing/2014/main" id="{BC548ED7-BE5F-14BD-F68B-14DE9768461D}"/>
+                <a16:creationId xmlns:a16="http://schemas.microsoft.com/office/drawing/2014/main" id="{929B68D9-3842-D0DB-2B22-6E9B7168811B}"/>
               </a:ext>
             </a:extLst>
           </p:cNvPr>
@@ -1380,7 +1380,7 @@
           <p:cNvPr id="5" name="日期占位符 4">
             <a:extLst>
               <a:ext uri="{FF2B5EF4-FFF2-40B4-BE49-F238E27FC236}">
-                <a16:creationId xmlns:a16="http://schemas.microsoft.com/office/drawing/2014/main" id="{BA9DACD8-0E64-2CF5-1EC4-C584D7BB03FB}"/>
+                <a16:creationId xmlns:a16="http://schemas.microsoft.com/office/drawing/2014/main" id="{D717CEBE-FCDD-33CB-D3F1-2DBEE8D1DFD7}"/>
               </a:ext>
             </a:extLst>
           </p:cNvPr>
@@ -1396,7 +1396,7 @@
           <a:bodyPr/>
           <a:lstStyle/>
           <a:p>
-            <a:fld id="{18C01C04-3DC0-4A24-A224-DFA7E91EC9FC}" type="datetimeFigureOut">
+            <a:fld id="{D80CACDC-A2EB-491F-835B-8E351DC3245E}" type="datetimeFigureOut">
               <a:rPr lang="zh-CN" altLang="en-US" smtClean="0"/>
               <a:t>2026/10/17</a:t>
             </a:fld>
@@ -1409,7 +1409,7 @@
           <p:cNvPr id="6" name="页脚占位符 5">
             <a:extLst>
               <a:ext uri="{FF2B5EF4-FFF2-40B4-BE49-F238E27FC236}">
-                <a16:creationId xmlns:a16="http://schemas.microsoft.com/office/drawing/2014/main" id="{911098F3-2C64-2024-3BEC-110D3030A6B1}"/>
+                <a16:creationId xmlns:a16="http://schemas.microsoft.com/office/drawing/2014/main" id="{7E267265-14A7-867F-0313-1009BEB001CE}"/>
               </a:ext>
             </a:extLst>
           </p:cNvPr>
@@ -1434,7 +1434,7 @@
           <p:cNvPr id="7" name="灯片编号占位符 6">
             <a:extLst>
               <a:ext uri="{FF2B5EF4-FFF2-40B4-BE49-F238E27FC236}">
-                <a16:creationId xmlns:a16="http://schemas.microsoft.com/office/drawing/2014/main" id="{D9C74B14-96A1-95FF-AA9D-D27FB5C159E7}"/>
+                <a16:creationId xmlns:a16="http://schemas.microsoft.com/office/drawing/2014/main" id="{37C9FF66-6665-34DB-7AF2-2AF2A140053D}"/>
               </a:ext>
             </a:extLst>
           </p:cNvPr>
@@ -1450,7 +1450,7 @@
           <a:bodyPr/>
           <a:lstStyle/>
           <a:p>
-            <a:fld id="{977BA5C2-78C0-42E3-92E2-271E6665EFE3}" type="slidenum">
+            <a:fld id="{0472F0E1-B9CB-41AB-B64C-386031966086}" type="slidenum">
               <a:rPr lang="zh-CN" altLang="en-US" smtClean="0"/>
               <a:t>‹#›</a:t>
             </a:fld>
@@ -1461,7 +1461,7 @@
     </p:spTree>
     <p:extLst>
       <p:ext uri="{BB962C8B-B14F-4D97-AF65-F5344CB8AC3E}">
-        <p14:creationId xmlns:p14="http://schemas.microsoft.com/office/powerpoint/2010/main" val="3719777750"/>
+        <p14:creationId xmlns:p14="http://schemas.microsoft.com/office/powerpoint/2010/main" val="416702821"/>
       </p:ext>
     </p:extLst>
   </p:cSld>
@@ -1493,7 +1493,7 @@
           <p:cNvPr id="2" name="标题 1">
             <a:extLst>
               <a:ext uri="{FF2B5EF4-FFF2-40B4-BE49-F238E27FC236}">
-                <a16:creationId xmlns:a16="http://schemas.microsoft.com/office/drawing/2014/main" id="{94E8FCA4-B8D9-30E8-1B54-64895F98CDB7}"/>
+                <a16:creationId xmlns:a16="http://schemas.microsoft.com/office/drawing/2014/main" id="{9ADC53C4-CC26-3710-C6F0-8A932E2AD087}"/>
               </a:ext>
             </a:extLst>
           </p:cNvPr>
@@ -1526,7 +1526,7 @@
           <p:cNvPr id="3" name="文本占位符 2">
             <a:extLst>
               <a:ext uri="{FF2B5EF4-FFF2-40B4-BE49-F238E27FC236}">
-                <a16:creationId xmlns:a16="http://schemas.microsoft.com/office/drawing/2014/main" id="{B4FA662D-610C-CCF7-1C84-F906142D38B1}"/>
+                <a16:creationId xmlns:a16="http://schemas.microsoft.com/office/drawing/2014/main" id="{0306F3C0-4D18-7063-34C7-2C8BEC7BE5D2}"/>
               </a:ext>
             </a:extLst>
           </p:cNvPr>
@@ -1597,7 +1597,7 @@
           <p:cNvPr id="4" name="内容占位符 3">
             <a:extLst>
               <a:ext uri="{FF2B5EF4-FFF2-40B4-BE49-F238E27FC236}">
-                <a16:creationId xmlns:a16="http://schemas.microsoft.com/office/drawing/2014/main" id="{8C7BBFAB-529D-AF05-175E-6184302A544E}"/>
+                <a16:creationId xmlns:a16="http://schemas.microsoft.com/office/drawing/2014/main" id="{F3E93210-9608-D896-D78F-36A56781F92E}"/>
               </a:ext>
             </a:extLst>
           </p:cNvPr>
@@ -1659,7 +1659,7 @@
           <p:cNvPr id="5" name="文本占位符 4">
             <a:extLst>
               <a:ext uri="{FF2B5EF4-FFF2-40B4-BE49-F238E27FC236}">
-                <a16:creationId xmlns:a16="http://schemas.microsoft.com/office/drawing/2014/main" id="{4C4146A5-E27C-D082-4059-6AC046178044}"/>
+                <a16:creationId xmlns:a16="http://schemas.microsoft.com/office/drawing/2014/main" id="{290A2D47-0170-CE48-B506-5E117A0FA927}"/>
               </a:ext>
             </a:extLst>
           </p:cNvPr>
@@ -1730,7 +1730,7 @@
           <p:cNvPr id="6" name="内容占位符 5">
             <a:extLst>
               <a:ext uri="{FF2B5EF4-FFF2-40B4-BE49-F238E27FC236}">
-                <a16:creationId xmlns:a16="http://schemas.microsoft.com/office/drawing/2014/main" id="{0B54671D-2695-0DFA-4BBD-15FA3A7DADF8}"/>
+                <a16:creationId xmlns:a16="http://schemas.microsoft.com/office/drawing/2014/main" id="{04E046E8-FEC6-70CB-15C8-EA470480489C}"/>
               </a:ext>
             </a:extLst>
           </p:cNvPr>
@@ -1792,7 +1792,7 @@
           <p:cNvPr id="7" name="日期占位符 6">
             <a:extLst>
               <a:ext uri="{FF2B5EF4-FFF2-40B4-BE49-F238E27FC236}">
-                <a16:creationId xmlns:a16="http://schemas.microsoft.com/office/drawing/2014/main" id="{8110BB51-E0B8-AB72-12B6-C1BB3AF2F087}"/>
+                <a16:creationId xmlns:a16="http://schemas.microsoft.com/office/drawing/2014/main" id="{197CDE13-3C04-8663-96D8-7782C34EEAB5}"/>
               </a:ext>
             </a:extLst>
           </p:cNvPr>
@@ -1808,7 +1808,7 @@
           <a:bodyPr/>
           <a:lstStyle/>
           <a:p>
-            <a:fld id="{18C01C04-3DC0-4A24-A224-DFA7E91EC9FC}" type="datetimeFigureOut">
+            <a:fld id="{D80CACDC-A2EB-491F-835B-8E351DC3245E}" type="datetimeFigureOut">
               <a:rPr lang="zh-CN" altLang="en-US" smtClean="0"/>
               <a:t>2026/10/17</a:t>
             </a:fld>
@@ -1821,7 +1821,7 @@
           <p:cNvPr id="8" name="页脚占位符 7">
             <a:extLst>
               <a:ext uri="{FF2B5EF4-FFF2-40B4-BE49-F238E27FC236}">
-                <a16:creationId xmlns:a16="http://schemas.microsoft.com/office/drawing/2014/main" id="{F75F70D1-31C4-6EC4-665A-6FAAA3372161}"/>
+                <a16:creationId xmlns:a16="http://schemas.microsoft.com/office/drawing/2014/main" id="{2B4E5457-C35D-355D-4E4D-159781B3D0EC}"/>
               </a:ext>
             </a:extLst>
           </p:cNvPr>
@@ -1846,7 +1846,7 @@
           <p:cNvPr id="9" name="灯片编号占位符 8">
             <a:extLst>
               <a:ext uri="{FF2B5EF4-FFF2-40B4-BE49-F238E27FC236}">
-                <a16:creationId xmlns:a16="http://schemas.microsoft.com/office/drawing/2014/main" id="{3BFDD0D6-4A6F-F0DB-41BD-64A63AA70DCE}"/>
+                <a16:creationId xmlns:a16="http://schemas.microsoft.com/office/drawing/2014/main" id="{CDFE5692-D9CE-1660-E2BF-5B4A32422707}"/>
               </a:ext>
             </a:extLst>
           </p:cNvPr>
@@ -1862,7 +1862,7 @@
           <a:bodyPr/>
           <a:lstStyle/>
           <a:p>
-            <a:fld id="{977BA5C2-78C0-42E3-92E2-271E6665EFE3}" type="slidenum">
+            <a:fld id="{0472F0E1-B9CB-41AB-B64C-386031966086}" type="slidenum">
               <a:rPr lang="zh-CN" altLang="en-US" smtClean="0"/>
               <a:t>‹#›</a:t>
             </a:fld>
@@ -1873,7 +1873,7 @@
     </p:spTree>
     <p:extLst>
       <p:ext uri="{BB962C8B-B14F-4D97-AF65-F5344CB8AC3E}">
-        <p14:creationId xmlns:p14="http://schemas.microsoft.com/office/powerpoint/2010/main" val="2849513966"/>
+        <p14:creationId xmlns:p14="http://schemas.microsoft.com/office/powerpoint/2010/main" val="2858807761"/>
       </p:ext>
     </p:extLst>
   </p:cSld>
@@ -1905,7 +1905,7 @@
           <p:cNvPr id="2" name="标题 1">
             <a:extLst>
               <a:ext uri="{FF2B5EF4-FFF2-40B4-BE49-F238E27FC236}">
-                <a16:creationId xmlns:a16="http://schemas.microsoft.com/office/drawing/2014/main" id="{4BA25154-BF44-55C7-3BC1-92ABE4396509}"/>
+                <a16:creationId xmlns:a16="http://schemas.microsoft.com/office/drawing/2014/main" id="{B60010D3-CA6D-09F4-66C8-E9C033D31D66}"/>
               </a:ext>
             </a:extLst>
           </p:cNvPr>
@@ -1933,7 +1933,7 @@
           <p:cNvPr id="3" name="日期占位符 2">
             <a:extLst>
               <a:ext uri="{FF2B5EF4-FFF2-40B4-BE49-F238E27FC236}">
-                <a16:creationId xmlns:a16="http://schemas.microsoft.com/office/drawing/2014/main" id="{F00834CA-10BE-D1EA-03E5-DBAA9F75E0EB}"/>
+                <a16:creationId xmlns:a16="http://schemas.microsoft.com/office/drawing/2014/main" id="{B0AA2E39-A021-CFE0-B77C-F11A8F74EBE0}"/>
               </a:ext>
             </a:extLst>
           </p:cNvPr>
@@ -1949,7 +1949,7 @@
           <a:bodyPr/>
           <a:lstStyle/>
           <a:p>
-            <a:fld id="{18C01C04-3DC0-4A24-A224-DFA7E91EC9FC}" type="datetimeFigureOut">
+            <a:fld id="{D80CACDC-A2EB-491F-835B-8E351DC3245E}" type="datetimeFigureOut">
               <a:rPr lang="zh-CN" altLang="en-US" smtClean="0"/>
               <a:t>2026/10/17</a:t>
             </a:fld>
@@ -1962,7 +1962,7 @@
           <p:cNvPr id="4" name="页脚占位符 3">
             <a:extLst>
               <a:ext uri="{FF2B5EF4-FFF2-40B4-BE49-F238E27FC236}">
-                <a16:creationId xmlns:a16="http://schemas.microsoft.com/office/drawing/2014/main" id="{DD57A1DB-1626-DE2C-B69E-F43C22106B37}"/>
+                <a16:creationId xmlns:a16="http://schemas.microsoft.com/office/drawing/2014/main" id="{04A57A5F-D0B6-3812-29E9-C0E530F64FEA}"/>
               </a:ext>
             </a:extLst>
           </p:cNvPr>
@@ -1987,7 +1987,7 @@
           <p:cNvPr id="5" name="灯片编号占位符 4">
             <a:extLst>
               <a:ext uri="{FF2B5EF4-FFF2-40B4-BE49-F238E27FC236}">
-                <a16:creationId xmlns:a16="http://schemas.microsoft.com/office/drawing/2014/main" id="{574B9245-36FF-A50C-ACFC-477F3C503B8C}"/>
+                <a16:creationId xmlns:a16="http://schemas.microsoft.com/office/drawing/2014/main" id="{ACE2B144-0443-8FB0-BDA5-DCFD34E5E962}"/>
               </a:ext>
             </a:extLst>
           </p:cNvPr>
@@ -2003,7 +2003,7 @@
           <a:bodyPr/>
           <a:lstStyle/>
           <a:p>
-            <a:fld id="{977BA5C2-78C0-42E3-92E2-271E6665EFE3}" type="slidenum">
+            <a:fld id="{0472F0E1-B9CB-41AB-B64C-386031966086}" type="slidenum">
               <a:rPr lang="zh-CN" altLang="en-US" smtClean="0"/>
               <a:t>‹#›</a:t>
             </a:fld>
@@ -2014,7 +2014,7 @@
     </p:spTree>
     <p:extLst>
       <p:ext uri="{BB962C8B-B14F-4D97-AF65-F5344CB8AC3E}">
-        <p14:creationId xmlns:p14="http://schemas.microsoft.com/office/powerpoint/2010/main" val="96823103"/>
+        <p14:creationId xmlns:p14="http://schemas.microsoft.com/office/powerpoint/2010/main" val="3245588917"/>
       </p:ext>
     </p:extLst>
   </p:cSld>
@@ -2046,7 +2046,7 @@
           <p:cNvPr id="2" name="日期占位符 1">
             <a:extLst>
               <a:ext uri="{FF2B5EF4-FFF2-40B4-BE49-F238E27FC236}">
-                <a16:creationId xmlns:a16="http://schemas.microsoft.com/office/drawing/2014/main" id="{911DC8C1-2797-DE21-BC7D-D007798C8B8A}"/>
+                <a16:creationId xmlns:a16="http://schemas.microsoft.com/office/drawing/2014/main" id="{8209441D-4590-5B81-6C45-E288BA00125D}"/>
               </a:ext>
             </a:extLst>
           </p:cNvPr>
@@ -2062,7 +2062,7 @@
           <a:bodyPr/>
           <a:lstStyle/>
           <a:p>
-            <a:fld id="{18C01C04-3DC0-4A24-A224-DFA7E91EC9FC}" type="datetimeFigureOut">
+            <a:fld id="{D80CACDC-A2EB-491F-835B-8E351DC3245E}" type="datetimeFigureOut">
               <a:rPr lang="zh-CN" altLang="en-US" smtClean="0"/>
               <a:t>2026/10/17</a:t>
             </a:fld>
@@ -2075,7 +2075,7 @@
           <p:cNvPr id="3" name="页脚占位符 2">
             <a:extLst>
               <a:ext uri="{FF2B5EF4-FFF2-40B4-BE49-F238E27FC236}">
-                <a16:creationId xmlns:a16="http://schemas.microsoft.com/office/drawing/2014/main" id="{B584B93D-7438-D308-2812-B78CB182FA51}"/>
+                <a16:creationId xmlns:a16="http://schemas.microsoft.com/office/drawing/2014/main" id="{B2E246F8-D474-7E6E-E2FB-86107ABC608A}"/>
               </a:ext>
             </a:extLst>
           </p:cNvPr>
@@ -2100,7 +2100,7 @@
           <p:cNvPr id="4" name="灯片编号占位符 3">
             <a:extLst>
               <a:ext uri="{FF2B5EF4-FFF2-40B4-BE49-F238E27FC236}">
-                <a16:creationId xmlns:a16="http://schemas.microsoft.com/office/drawing/2014/main" id="{0907A452-758E-3AF7-2F6D-6F0AD24DF258}"/>
+                <a16:creationId xmlns:a16="http://schemas.microsoft.com/office/drawing/2014/main" id="{61B89F60-31E6-19D1-1D6F-932B9E1CB471}"/>
               </a:ext>
             </a:extLst>
           </p:cNvPr>
@@ -2116,7 +2116,7 @@
           <a:bodyPr/>
           <a:lstStyle/>
           <a:p>
-            <a:fld id="{977BA5C2-78C0-42E3-92E2-271E6665EFE3}" type="slidenum">
+            <a:fld id="{0472F0E1-B9CB-41AB-B64C-386031966086}" type="slidenum">
               <a:rPr lang="zh-CN" altLang="en-US" smtClean="0"/>
               <a:t>‹#›</a:t>
             </a:fld>
@@ -2127,7 +2127,7 @@
     </p:spTree>
     <p:extLst>
       <p:ext uri="{BB962C8B-B14F-4D97-AF65-F5344CB8AC3E}">
-        <p14:creationId xmlns:p14="http://schemas.microsoft.com/office/powerpoint/2010/main" val="54520628"/>
+        <p14:creationId xmlns:p14="http://schemas.microsoft.com/office/powerpoint/2010/main" val="1103225287"/>
       </p:ext>
     </p:extLst>
   </p:cSld>
@@ -2159,7 +2159,7 @@
           <p:cNvPr id="2" name="标题 1">
             <a:extLst>
               <a:ext uri="{FF2B5EF4-FFF2-40B4-BE49-F238E27FC236}">
-                <a16:creationId xmlns:a16="http://schemas.microsoft.com/office/drawing/2014/main" id="{8315D9AB-5923-0D6C-70AF-309E486D219A}"/>
+                <a16:creationId xmlns:a16="http://schemas.microsoft.com/office/drawing/2014/main" id="{4C756F7C-DBFA-68F9-B572-5CCECDB2AD77}"/>
               </a:ext>
             </a:extLst>
           </p:cNvPr>
@@ -2196,7 +2196,7 @@
           <p:cNvPr id="3" name="内容占位符 2">
             <a:extLst>
               <a:ext uri="{FF2B5EF4-FFF2-40B4-BE49-F238E27FC236}">
-                <a16:creationId xmlns:a16="http://schemas.microsoft.com/office/drawing/2014/main" id="{568BB7BC-DE1A-C23A-0628-45D42585733C}"/>
+                <a16:creationId xmlns:a16="http://schemas.microsoft.com/office/drawing/2014/main" id="{9AAA27E0-20D3-6189-E230-4B112234569D}"/>
               </a:ext>
             </a:extLst>
           </p:cNvPr>
@@ -2286,7 +2286,7 @@
           <p:cNvPr id="4" name="文本占位符 3">
             <a:extLst>
               <a:ext uri="{FF2B5EF4-FFF2-40B4-BE49-F238E27FC236}">
-                <a16:creationId xmlns:a16="http://schemas.microsoft.com/office/drawing/2014/main" id="{E81A2906-4F9B-2E78-85FA-F2AD1FD4A7A8}"/>
+                <a16:creationId xmlns:a16="http://schemas.microsoft.com/office/drawing/2014/main" id="{64E67164-2957-043D-BB85-280C365C12A5}"/>
               </a:ext>
             </a:extLst>
           </p:cNvPr>
@@ -2357,7 +2357,7 @@
           <p:cNvPr id="5" name="日期占位符 4">
             <a:extLst>
               <a:ext uri="{FF2B5EF4-FFF2-40B4-BE49-F238E27FC236}">
-                <a16:creationId xmlns:a16="http://schemas.microsoft.com/office/drawing/2014/main" id="{E78E7465-F19A-A8F3-4B29-011C3318EDDF}"/>
+                <a16:creationId xmlns:a16="http://schemas.microsoft.com/office/drawing/2014/main" id="{4476A286-97F2-DA74-EF3B-9535C05C2194}"/>
               </a:ext>
             </a:extLst>
           </p:cNvPr>
@@ -2373,7 +2373,7 @@
           <a:bodyPr/>
           <a:lstStyle/>
           <a:p>
-            <a:fld id="{18C01C04-3DC0-4A24-A224-DFA7E91EC9FC}" type="datetimeFigureOut">
+            <a:fld id="{D80CACDC-A2EB-491F-835B-8E351DC3245E}" type="datetimeFigureOut">
               <a:rPr lang="zh-CN" altLang="en-US" smtClean="0"/>
               <a:t>2026/10/17</a:t>
             </a:fld>
@@ -2386,7 +2386,7 @@
           <p:cNvPr id="6" name="页脚占位符 5">
             <a:extLst>
               <a:ext uri="{FF2B5EF4-FFF2-40B4-BE49-F238E27FC236}">
-                <a16:creationId xmlns:a16="http://schemas.microsoft.com/office/drawing/2014/main" id="{48C7F9D5-9643-19E4-8DDC-EF31533F4418}"/>
+                <a16:creationId xmlns:a16="http://schemas.microsoft.com/office/drawing/2014/main" id="{DB9BC653-0B44-3626-FB7D-13661BC8C17E}"/>
               </a:ext>
             </a:extLst>
           </p:cNvPr>
@@ -2411,7 +2411,7 @@
           <p:cNvPr id="7" name="灯片编号占位符 6">
             <a:extLst>
               <a:ext uri="{FF2B5EF4-FFF2-40B4-BE49-F238E27FC236}">
-                <a16:creationId xmlns:a16="http://schemas.microsoft.com/office/drawing/2014/main" id="{B3F0E1A4-0D0D-D174-7EBD-E26992B40C09}"/>
+                <a16:creationId xmlns:a16="http://schemas.microsoft.com/office/drawing/2014/main" id="{8BBEE739-3AA7-6762-13F1-B26F899865BE}"/>
               </a:ext>
             </a:extLst>
           </p:cNvPr>
@@ -2427,7 +2427,7 @@
           <a:bodyPr/>
           <a:lstStyle/>
           <a:p>
-            <a:fld id="{977BA5C2-78C0-42E3-92E2-271E6665EFE3}" type="slidenum">
+            <a:fld id="{0472F0E1-B9CB-41AB-B64C-386031966086}" type="slidenum">
               <a:rPr lang="zh-CN" altLang="en-US" smtClean="0"/>
               <a:t>‹#›</a:t>
             </a:fld>
@@ -2438,7 +2438,7 @@
     </p:spTree>
     <p:extLst>
       <p:ext uri="{BB962C8B-B14F-4D97-AF65-F5344CB8AC3E}">
-        <p14:creationId xmlns:p14="http://schemas.microsoft.com/office/powerpoint/2010/main" val="3313004660"/>
+        <p14:creationId xmlns:p14="http://schemas.microsoft.com/office/powerpoint/2010/main" val="3285583746"/>
       </p:ext>
     </p:extLst>
   </p:cSld>
@@ -2470,7 +2470,7 @@
           <p:cNvPr id="2" name="标题 1">
             <a:extLst>
               <a:ext uri="{FF2B5EF4-FFF2-40B4-BE49-F238E27FC236}">
-                <a16:creationId xmlns:a16="http://schemas.microsoft.com/office/drawing/2014/main" id="{65791B54-F892-E412-CA01-CA77854A743D}"/>
+                <a16:creationId xmlns:a16="http://schemas.microsoft.com/office/drawing/2014/main" id="{1E5A494D-9213-9059-3E6E-5702114D4579}"/>
               </a:ext>
             </a:extLst>
           </p:cNvPr>
@@ -2507,7 +2507,7 @@
           <p:cNvPr id="3" name="图片占位符 2">
             <a:extLst>
               <a:ext uri="{FF2B5EF4-FFF2-40B4-BE49-F238E27FC236}">
-                <a16:creationId xmlns:a16="http://schemas.microsoft.com/office/drawing/2014/main" id="{C94C7B44-3935-2CEE-2AF9-6CD1D5A7B8B0}"/>
+                <a16:creationId xmlns:a16="http://schemas.microsoft.com/office/drawing/2014/main" id="{C3C57EAA-A6CB-081C-DE9C-0419347A6401}"/>
               </a:ext>
             </a:extLst>
           </p:cNvPr>
@@ -2574,7 +2574,7 @@
           <p:cNvPr id="4" name="文本占位符 3">
             <a:extLst>
               <a:ext uri="{FF2B5EF4-FFF2-40B4-BE49-F238E27FC236}">
-                <a16:creationId xmlns:a16="http://schemas.microsoft.com/office/drawing/2014/main" id="{586D1950-2CCB-E1D1-AFB7-74F8A70E08A4}"/>
+                <a16:creationId xmlns:a16="http://schemas.microsoft.com/office/drawing/2014/main" id="{E80193D7-CFD2-4B32-4F92-83C7E32F24F5}"/>
               </a:ext>
             </a:extLst>
           </p:cNvPr>
@@ -2645,7 +2645,7 @@
           <p:cNvPr id="5" name="日期占位符 4">
             <a:extLst>
               <a:ext uri="{FF2B5EF4-FFF2-40B4-BE49-F238E27FC236}">
-                <a16:creationId xmlns:a16="http://schemas.microsoft.com/office/drawing/2014/main" id="{D9D4B04E-E6F0-E76D-DD8F-FFF6361753FF}"/>
+                <a16:creationId xmlns:a16="http://schemas.microsoft.com/office/drawing/2014/main" id="{DC3205CC-211F-05D9-3A3D-B06CD2463FF0}"/>
               </a:ext>
             </a:extLst>
           </p:cNvPr>
@@ -2661,7 +2661,7 @@
           <a:bodyPr/>
           <a:lstStyle/>
           <a:p>
-            <a:fld id="{18C01C04-3DC0-4A24-A224-DFA7E91EC9FC}" type="datetimeFigureOut">
+            <a:fld id="{D80CACDC-A2EB-491F-835B-8E351DC3245E}" type="datetimeFigureOut">
               <a:rPr lang="zh-CN" altLang="en-US" smtClean="0"/>
               <a:t>2026/10/17</a:t>
             </a:fld>
@@ -2674,7 +2674,7 @@
           <p:cNvPr id="6" name="页脚占位符 5">
             <a:extLst>
               <a:ext uri="{FF2B5EF4-FFF2-40B4-BE49-F238E27FC236}">
-                <a16:creationId xmlns:a16="http://schemas.microsoft.com/office/drawing/2014/main" id="{85CC42FC-4826-D7F3-3046-1471760643F9}"/>
+                <a16:creationId xmlns:a16="http://schemas.microsoft.com/office/drawing/2014/main" id="{3C5CF78D-F2F5-8DAE-4448-79393204B5C5}"/>
               </a:ext>
             </a:extLst>
           </p:cNvPr>
@@ -2699,7 +2699,7 @@
           <p:cNvPr id="7" name="灯片编号占位符 6">
             <a:extLst>
               <a:ext uri="{FF2B5EF4-FFF2-40B4-BE49-F238E27FC236}">
-                <a16:creationId xmlns:a16="http://schemas.microsoft.com/office/drawing/2014/main" id="{F9ED1259-3F10-AA70-387C-44628CE1B2B4}"/>
+                <a16:creationId xmlns:a16="http://schemas.microsoft.com/office/drawing/2014/main" id="{EB7DE5AC-A12C-4C4B-2EE3-BD97D1BCC149}"/>
               </a:ext>
             </a:extLst>
           </p:cNvPr>
@@ -2715,7 +2715,7 @@
           <a:bodyPr/>
           <a:lstStyle/>
           <a:p>
-            <a:fld id="{977BA5C2-78C0-42E3-92E2-271E6665EFE3}" type="slidenum">
+            <a:fld id="{0472F0E1-B9CB-41AB-B64C-386031966086}" type="slidenum">
               <a:rPr lang="zh-CN" altLang="en-US" smtClean="0"/>
               <a:t>‹#›</a:t>
             </a:fld>
@@ -2726,7 +2726,7 @@
     </p:spTree>
     <p:extLst>
       <p:ext uri="{BB962C8B-B14F-4D97-AF65-F5344CB8AC3E}">
-        <p14:creationId xmlns:p14="http://schemas.microsoft.com/office/powerpoint/2010/main" val="3174113319"/>
+        <p14:creationId xmlns:p14="http://schemas.microsoft.com/office/powerpoint/2010/main" val="1229286732"/>
       </p:ext>
     </p:extLst>
   </p:cSld>
@@ -2763,7 +2763,7 @@
           <p:cNvPr id="2" name="标题占位符 1">
             <a:extLst>
               <a:ext uri="{FF2B5EF4-FFF2-40B4-BE49-F238E27FC236}">
-                <a16:creationId xmlns:a16="http://schemas.microsoft.com/office/drawing/2014/main" id="{EFF4E458-06B3-6D8F-BB2D-9643A2FD61D2}"/>
+                <a16:creationId xmlns:a16="http://schemas.microsoft.com/office/drawing/2014/main" id="{77DE1794-A2D2-E66C-0F1E-CEACEE330E92}"/>
               </a:ext>
             </a:extLst>
           </p:cNvPr>
@@ -2801,7 +2801,7 @@
           <p:cNvPr id="3" name="文本占位符 2">
             <a:extLst>
               <a:ext uri="{FF2B5EF4-FFF2-40B4-BE49-F238E27FC236}">
-                <a16:creationId xmlns:a16="http://schemas.microsoft.com/office/drawing/2014/main" id="{B2DACD04-4451-2D14-E0AA-5C4F290A7E2C}"/>
+                <a16:creationId xmlns:a16="http://schemas.microsoft.com/office/drawing/2014/main" id="{FEFCA5FE-AA5D-E955-6C7E-80010C715F51}"/>
               </a:ext>
             </a:extLst>
           </p:cNvPr>
@@ -2868,7 +2868,7 @@
           <p:cNvPr id="4" name="日期占位符 3">
             <a:extLst>
               <a:ext uri="{FF2B5EF4-FFF2-40B4-BE49-F238E27FC236}">
-                <a16:creationId xmlns:a16="http://schemas.microsoft.com/office/drawing/2014/main" id="{07B59C18-47F0-28FF-23E6-8FE106C8FAD9}"/>
+                <a16:creationId xmlns:a16="http://schemas.microsoft.com/office/drawing/2014/main" id="{73B7FFB6-6273-DD3B-832E-8C87E734DD8D}"/>
               </a:ext>
             </a:extLst>
           </p:cNvPr>
@@ -2902,7 +2902,7 @@
             </a:lvl1pPr>
           </a:lstStyle>
           <a:p>
-            <a:fld id="{18C01C04-3DC0-4A24-A224-DFA7E91EC9FC}" type="datetimeFigureOut">
+            <a:fld id="{D80CACDC-A2EB-491F-835B-8E351DC3245E}" type="datetimeFigureOut">
               <a:rPr lang="zh-CN" altLang="en-US" smtClean="0"/>
               <a:t>2026/10/17</a:t>
             </a:fld>
@@ -2915,7 +2915,7 @@
           <p:cNvPr id="5" name="页脚占位符 4">
             <a:extLst>
               <a:ext uri="{FF2B5EF4-FFF2-40B4-BE49-F238E27FC236}">
-                <a16:creationId xmlns:a16="http://schemas.microsoft.com/office/drawing/2014/main" id="{362139B8-0A9A-3197-5D66-24A9C505956C}"/>
+                <a16:creationId xmlns:a16="http://schemas.microsoft.com/office/drawing/2014/main" id="{131470A8-C0EC-4784-CDD6-56E2394BCC1D}"/>
               </a:ext>
             </a:extLst>
           </p:cNvPr>
@@ -2958,7 +2958,7 @@
           <p:cNvPr id="6" name="灯片编号占位符 5">
             <a:extLst>
               <a:ext uri="{FF2B5EF4-FFF2-40B4-BE49-F238E27FC236}">
-                <a16:creationId xmlns:a16="http://schemas.microsoft.com/office/drawing/2014/main" id="{66D3562C-BB98-9756-5D75-C3D0B5933AAA}"/>
+                <a16:creationId xmlns:a16="http://schemas.microsoft.com/office/drawing/2014/main" id="{3AD15A68-3651-04FC-1684-7497ED6DE536}"/>
               </a:ext>
             </a:extLst>
           </p:cNvPr>
@@ -2992,7 +2992,7 @@
             </a:lvl1pPr>
           </a:lstStyle>
           <a:p>
-            <a:fld id="{977BA5C2-78C0-42E3-92E2-271E6665EFE3}" type="slidenum">
+            <a:fld id="{0472F0E1-B9CB-41AB-B64C-386031966086}" type="slidenum">
               <a:rPr lang="zh-CN" altLang="en-US" smtClean="0"/>
               <a:t>‹#›</a:t>
             </a:fld>
@@ -3003,7 +3003,7 @@
     </p:spTree>
     <p:extLst>
       <p:ext uri="{BB962C8B-B14F-4D97-AF65-F5344CB8AC3E}">
-        <p14:creationId xmlns:p14="http://schemas.microsoft.com/office/powerpoint/2010/main" val="208368316"/>
+        <p14:creationId xmlns:p14="http://schemas.microsoft.com/office/powerpoint/2010/main" val="3485657029"/>
       </p:ext>
     </p:extLst>
   </p:cSld>
@@ -3326,7 +3326,7 @@
           <p:cNvPr id="2" name="文本框 1">
             <a:extLst>
               <a:ext uri="{FF2B5EF4-FFF2-40B4-BE49-F238E27FC236}">
-                <a16:creationId xmlns:a16="http://schemas.microsoft.com/office/drawing/2014/main" id="{7BCC51A0-D2AB-8BF7-BF1D-E78028F99BEE}"/>
+                <a16:creationId xmlns:a16="http://schemas.microsoft.com/office/drawing/2014/main" id="{E15CF436-6BEF-5F72-8FB5-0B0CC8FB28C4}"/>
               </a:ext>
             </a:extLst>
           </p:cNvPr>
@@ -3335,7 +3335,7 @@
         </p:nvSpPr>
         <p:spPr>
           <a:xfrm>
-            <a:off x="381000" y="381000"/>
+            <a:off x="381000" y="254000"/>
             <a:ext cx="3054350" cy="369332"/>
           </a:xfrm>
           <a:prstGeom prst="rect">
@@ -3383,7 +3383,7 @@
           <p:cNvPr id="3" name="文本框 2">
             <a:extLst>
               <a:ext uri="{FF2B5EF4-FFF2-40B4-BE49-F238E27FC236}">
-                <a16:creationId xmlns:a16="http://schemas.microsoft.com/office/drawing/2014/main" id="{CD31A7C7-3E44-E580-8F41-1061806EF192}"/>
+                <a16:creationId xmlns:a16="http://schemas.microsoft.com/office/drawing/2014/main" id="{63FBCF79-A403-9449-6DC8-0D7F46C2A8E8}"/>
               </a:ext>
             </a:extLst>
           </p:cNvPr>
@@ -3392,7 +3392,7 @@
         </p:nvSpPr>
         <p:spPr>
           <a:xfrm>
-            <a:off x="381000" y="2286000"/>
+            <a:off x="381000" y="1841500"/>
             <a:ext cx="3054350" cy="369332"/>
           </a:xfrm>
           <a:prstGeom prst="rect">
@@ -3440,7 +3440,7 @@
           <p:cNvPr id="4" name="文本框 3">
             <a:extLst>
               <a:ext uri="{FF2B5EF4-FFF2-40B4-BE49-F238E27FC236}">
-                <a16:creationId xmlns:a16="http://schemas.microsoft.com/office/drawing/2014/main" id="{3B5A0E07-8AD2-1EBB-DB87-F01FC19AEAAB}"/>
+                <a16:creationId xmlns:a16="http://schemas.microsoft.com/office/drawing/2014/main" id="{787B95F2-2A1E-A92A-5ED9-1B7ACD222500}"/>
               </a:ext>
             </a:extLst>
           </p:cNvPr>
@@ -3449,7 +3449,7 @@
         </p:nvSpPr>
         <p:spPr>
           <a:xfrm>
-            <a:off x="381000" y="4191000"/>
+            <a:off x="381000" y="3429000"/>
             <a:ext cx="3054350" cy="369332"/>
           </a:xfrm>
           <a:prstGeom prst="rect">
@@ -3497,7 +3497,7 @@
           <p:cNvPr id="5" name="文本框 4">
             <a:extLst>
               <a:ext uri="{FF2B5EF4-FFF2-40B4-BE49-F238E27FC236}">
-                <a16:creationId xmlns:a16="http://schemas.microsoft.com/office/drawing/2014/main" id="{32421D14-9299-2C44-EEBB-37AD905C88F5}"/>
+                <a16:creationId xmlns:a16="http://schemas.microsoft.com/office/drawing/2014/main" id="{A3BF76BF-46F1-136D-1E41-75C42025C345}"/>
               </a:ext>
             </a:extLst>
           </p:cNvPr>
@@ -3506,7 +3506,7 @@
         </p:nvSpPr>
         <p:spPr>
           <a:xfrm>
-            <a:off x="6223000" y="381000"/>
+            <a:off x="381000" y="5016500"/>
             <a:ext cx="3054350" cy="369332"/>
           </a:xfrm>
           <a:prstGeom prst="rect">
@@ -3526,21 +3526,21 @@
           <a:lstStyle/>
           <a:p>
             <a:r>
-              <a:rPr lang="zh-CN" sz="2400">
+              <a:rPr lang="en-US" altLang="zh-CN" sz="2400">
                 <a:latin typeface="Microsoft YaHei" panose="020B0503020204020204" pitchFamily="34" charset="-122"/>
                 <a:ea typeface="Microsoft YaHei" panose="020B0503020204020204" pitchFamily="34" charset="-122"/>
               </a:rPr>
-              <a:t>一二三四五六七八九十）</a:t>
-            </a:r>
-            <a:r>
-              <a:rPr lang="zh-CN" sz="2400">
+              <a:t>一二三四五六七八九十、</a:t>
+            </a:r>
+            <a:r>
+              <a:rPr lang="en-US" altLang="zh-CN" sz="2400">
                 <a:latin typeface="Microsoft YaHei" panose="020B0503020204020204" pitchFamily="34" charset="-122"/>
                 <a:ea typeface="Microsoft YaHei" panose="020B0503020204020204" pitchFamily="34" charset="-122"/>
               </a:rPr>
               <a:t/>
             </a:r>
             <a:r>
-              <a:rPr lang="zh-CN" sz="2400">
+              <a:rPr lang="en-US" altLang="zh-CN" sz="2400">
                 <a:latin typeface="Microsoft YaHei" panose="020B0503020204020204" pitchFamily="34" charset="-122"/>
                 <a:ea typeface="Microsoft YaHei" panose="020B0503020204020204" pitchFamily="34" charset="-122"/>
               </a:rPr>
@@ -3554,7 +3554,7 @@
           <p:cNvPr id="6" name="文本框 5">
             <a:extLst>
               <a:ext uri="{FF2B5EF4-FFF2-40B4-BE49-F238E27FC236}">
-                <a16:creationId xmlns:a16="http://schemas.microsoft.com/office/drawing/2014/main" id="{84555EBC-DFC6-E925-E04A-3B568ED9D4AE}"/>
+                <a16:creationId xmlns:a16="http://schemas.microsoft.com/office/drawing/2014/main" id="{05847B25-E7D3-F33B-02AA-AE5E88F9CE22}"/>
               </a:ext>
             </a:extLst>
           </p:cNvPr>
@@ -3563,7 +3563,7 @@
         </p:nvSpPr>
         <p:spPr>
           <a:xfrm>
-            <a:off x="6223000" y="2286000"/>
+            <a:off x="6223000" y="254000"/>
             <a:ext cx="3054350" cy="369332"/>
           </a:xfrm>
           <a:prstGeom prst="rect">
@@ -3583,21 +3583,21 @@
           <a:lstStyle/>
           <a:p>
             <a:r>
-              <a:rPr lang="en-US" sz="2400">
+              <a:rPr lang="zh-CN" sz="2400">
                 <a:latin typeface="Microsoft YaHei" panose="020B0503020204020204" pitchFamily="34" charset="-122"/>
                 <a:ea typeface="Microsoft YaHei" panose="020B0503020204020204" pitchFamily="34" charset="-122"/>
               </a:rPr>
               <a:t>一二三四五六七八九十）</a:t>
             </a:r>
             <a:r>
-              <a:rPr lang="en-US" sz="2400">
+              <a:rPr lang="zh-CN" sz="2400">
                 <a:latin typeface="Microsoft YaHei" panose="020B0503020204020204" pitchFamily="34" charset="-122"/>
                 <a:ea typeface="Microsoft YaHei" panose="020B0503020204020204" pitchFamily="34" charset="-122"/>
               </a:rPr>
               <a:t/>
             </a:r>
             <a:r>
-              <a:rPr lang="en-US" sz="2400">
+              <a:rPr lang="zh-CN" sz="2400">
                 <a:latin typeface="Microsoft YaHei" panose="020B0503020204020204" pitchFamily="34" charset="-122"/>
                 <a:ea typeface="Microsoft YaHei" panose="020B0503020204020204" pitchFamily="34" charset="-122"/>
               </a:rPr>
@@ -3611,7 +3611,7 @@
           <p:cNvPr id="7" name="文本框 6">
             <a:extLst>
               <a:ext uri="{FF2B5EF4-FFF2-40B4-BE49-F238E27FC236}">
-                <a16:creationId xmlns:a16="http://schemas.microsoft.com/office/drawing/2014/main" id="{B4986482-4436-0D05-3A8E-045C70376ED2}"/>
+                <a16:creationId xmlns:a16="http://schemas.microsoft.com/office/drawing/2014/main" id="{DB345E4C-8791-13B3-5912-73519CF13D11}"/>
               </a:ext>
             </a:extLst>
           </p:cNvPr>
@@ -3620,7 +3620,7 @@
         </p:nvSpPr>
         <p:spPr>
           <a:xfrm>
-            <a:off x="6223000" y="4191000"/>
+            <a:off x="6223000" y="1841500"/>
             <a:ext cx="3054350" cy="369332"/>
           </a:xfrm>
           <a:prstGeom prst="rect">
@@ -3640,6 +3640,63 @@
           <a:lstStyle/>
           <a:p>
             <a:r>
+              <a:rPr lang="en-US" sz="2400">
+                <a:latin typeface="Microsoft YaHei" panose="020B0503020204020204" pitchFamily="34" charset="-122"/>
+                <a:ea typeface="Microsoft YaHei" panose="020B0503020204020204" pitchFamily="34" charset="-122"/>
+              </a:rPr>
+              <a:t>一二三四五六七八九十）</a:t>
+            </a:r>
+            <a:r>
+              <a:rPr lang="en-US" sz="2400">
+                <a:latin typeface="Microsoft YaHei" panose="020B0503020204020204" pitchFamily="34" charset="-122"/>
+                <a:ea typeface="Microsoft YaHei" panose="020B0503020204020204" pitchFamily="34" charset="-122"/>
+              </a:rPr>
+              <a:t/>
+            </a:r>
+            <a:r>
+              <a:rPr lang="en-US" sz="2400">
+                <a:latin typeface="Microsoft YaHei" panose="020B0503020204020204" pitchFamily="34" charset="-122"/>
+                <a:ea typeface="Microsoft YaHei" panose="020B0503020204020204" pitchFamily="34" charset="-122"/>
+              </a:rPr>
+              <a:t>后续文字后续</a:t>
+            </a:r>
+          </a:p>
+        </p:txBody>
+      </p:sp>
+      <p:sp>
+        <p:nvSpPr>
+          <p:cNvPr id="8" name="文本框 7">
+            <a:extLst>
+              <a:ext uri="{FF2B5EF4-FFF2-40B4-BE49-F238E27FC236}">
+                <a16:creationId xmlns:a16="http://schemas.microsoft.com/office/drawing/2014/main" id="{189815E8-7C92-AB41-641B-9815F1C4E0E0}"/>
+              </a:ext>
+            </a:extLst>
+          </p:cNvPr>
+          <p:cNvSpPr txBox="1"/>
+          <p:nvPr/>
+        </p:nvSpPr>
+        <p:spPr>
+          <a:xfrm>
+            <a:off x="6223000" y="3429000"/>
+            <a:ext cx="3054350" cy="369332"/>
+          </a:xfrm>
+          <a:prstGeom prst="rect">
+            <a:avLst/>
+          </a:prstGeom>
+          <a:noFill/>
+          <a:ln>
+            <a:solidFill>
+              <a:srgbClr val="C8C8C8"/>
+            </a:solidFill>
+          </a:ln>
+        </p:spPr>
+        <p:txBody>
+          <a:bodyPr vert="horz" wrap="square" lIns="0" rIns="0" rtlCol="0">
+            <a:noAutofit/>
+          </a:bodyPr>
+          <a:lstStyle/>
+          <a:p>
+            <a:r>
               <a:rPr sz="2400">
                 <a:latin typeface="Microsoft YaHei" panose="020B0503020204020204" pitchFamily="34" charset="-122"/>
                 <a:ea typeface="Microsoft YaHei" panose="020B0503020204020204" pitchFamily="34" charset="-122"/>
@@ -3663,10 +3720,67 @@
           </a:p>
         </p:txBody>
       </p:sp>
+      <p:sp>
+        <p:nvSpPr>
+          <p:cNvPr id="9" name="文本框 8">
+            <a:extLst>
+              <a:ext uri="{FF2B5EF4-FFF2-40B4-BE49-F238E27FC236}">
+                <a16:creationId xmlns:a16="http://schemas.microsoft.com/office/drawing/2014/main" id="{6B2D8EF9-5C8B-38EA-1B86-48A0A120F506}"/>
+              </a:ext>
+            </a:extLst>
+          </p:cNvPr>
+          <p:cNvSpPr txBox="1"/>
+          <p:nvPr/>
+        </p:nvSpPr>
+        <p:spPr>
+          <a:xfrm>
+            <a:off x="6223000" y="5016500"/>
+            <a:ext cx="3054350" cy="369332"/>
+          </a:xfrm>
+          <a:prstGeom prst="rect">
+            <a:avLst/>
+          </a:prstGeom>
+          <a:noFill/>
+          <a:ln>
+            <a:solidFill>
+              <a:srgbClr val="C8C8C8"/>
+            </a:solidFill>
+          </a:ln>
+        </p:spPr>
+        <p:txBody>
+          <a:bodyPr vert="horz" wrap="square" lIns="0" rIns="0" rtlCol="0">
+            <a:noAutofit/>
+          </a:bodyPr>
+          <a:lstStyle/>
+          <a:p>
+            <a:r>
+              <a:rPr lang="en-US" altLang="zh-CN" sz="2400">
+                <a:latin typeface="Microsoft YaHei" panose="020B0503020204020204" pitchFamily="34" charset="-122"/>
+                <a:ea typeface="Microsoft YaHei" panose="020B0503020204020204" pitchFamily="34" charset="-122"/>
+              </a:rPr>
+              <a:t>一二三四五六七八九十）</a:t>
+            </a:r>
+            <a:r>
+              <a:rPr lang="en-US" altLang="zh-CN" sz="2400">
+                <a:latin typeface="Microsoft YaHei" panose="020B0503020204020204" pitchFamily="34" charset="-122"/>
+                <a:ea typeface="Microsoft YaHei" panose="020B0503020204020204" pitchFamily="34" charset="-122"/>
+              </a:rPr>
+              <a:t/>
+            </a:r>
+            <a:r>
+              <a:rPr lang="en-US" altLang="zh-CN" sz="2400">
+                <a:latin typeface="Microsoft YaHei" panose="020B0503020204020204" pitchFamily="34" charset="-122"/>
+                <a:ea typeface="Microsoft YaHei" panose="020B0503020204020204" pitchFamily="34" charset="-122"/>
+              </a:rPr>
+              <a:t>后续文字后续</a:t>
+            </a:r>
+          </a:p>
+        </p:txBody>
+      </p:sp>
     </p:spTree>
     <p:extLst>
       <p:ext uri="{BB962C8B-B14F-4D97-AF65-F5344CB8AC3E}">
-        <p14:creationId xmlns:p14="http://schemas.microsoft.com/office/powerpoint/2010/main" val="1993021678"/>
+        <p14:creationId xmlns:p14="http://schemas.microsoft.com/office/powerpoint/2010/main" val="1697640594"/>
       </p:ext>
     </p:extLst>
   </p:cSld>
